--- a/ML_fuzzy_deduplication.pptx
+++ b/ML_fuzzy_deduplication.pptx
@@ -12207,29 +12207,53 @@
           </a:p>
           <a:p>
             <a:r>
-              <a:rPr lang="en-US" sz="1600" dirty="0"/>
+              <a:rPr lang="en-US" sz="1600" b="1" dirty="0">
+                <a:solidFill>
+                  <a:srgbClr val="FF0000"/>
+                </a:solidFill>
+              </a:rPr>
               <a:t>160 </a:t>
             </a:r>
             <a:r>
-              <a:rPr lang="en-US" sz="1600" dirty="0" err="1"/>
+              <a:rPr lang="en-US" sz="1600" b="1" dirty="0" err="1">
+                <a:solidFill>
+                  <a:srgbClr val="FF0000"/>
+                </a:solidFill>
+              </a:rPr>
               <a:t>Mln</a:t>
             </a:r>
             <a:r>
-              <a:rPr lang="en-US" sz="1600" dirty="0"/>
+              <a:rPr lang="en-US" sz="1600" b="1" dirty="0">
+                <a:solidFill>
+                  <a:srgbClr val="FF0000"/>
+                </a:solidFill>
+              </a:rPr>
               <a:t> names matched to 10 </a:t>
             </a:r>
             <a:r>
-              <a:rPr lang="en-US" sz="1600" dirty="0" err="1"/>
+              <a:rPr lang="en-US" sz="1600" b="1" dirty="0" err="1">
+                <a:solidFill>
+                  <a:srgbClr val="FF0000"/>
+                </a:solidFill>
+              </a:rPr>
               <a:t>Mln</a:t>
             </a:r>
             <a:r>
-              <a:rPr lang="en-US" sz="1600" dirty="0"/>
+              <a:rPr lang="en-US" sz="1600" b="1" dirty="0">
+                <a:solidFill>
+                  <a:srgbClr val="FF0000"/>
+                </a:solidFill>
+              </a:rPr>
               <a:t> "ground truth" names </a:t>
             </a:r>
           </a:p>
           <a:p>
             <a:r>
-              <a:rPr lang="en-US" sz="1600" dirty="0"/>
+              <a:rPr lang="en-US" sz="1600" b="1" dirty="0">
+                <a:solidFill>
+                  <a:srgbClr val="FF0000"/>
+                </a:solidFill>
+              </a:rPr>
               <a:t>on a 10 node Spark cluster in 5 hours.</a:t>
             </a:r>
           </a:p>
@@ -12238,9 +12262,6 @@
               <a:rPr lang="en-US" sz="1600" dirty="0"/>
               <a:t>(approximately 8,000 names per second).</a:t>
             </a:r>
-          </a:p>
-          <a:p>
-            <a:endParaRPr lang="en-US" sz="1600" dirty="0"/>
           </a:p>
           <a:p>
             <a:r>
@@ -12252,6 +12273,22 @@
                 <a:hlinkClick r:id="rId2"/>
               </a:rPr>
               <a:t>https://www.youtube.com/watch?v=IOjVMxGSmEQ</a:t>
+            </a:r>
+            <a:r>
+              <a:rPr lang="en-US" sz="1600" dirty="0"/>
+              <a:t> </a:t>
+            </a:r>
+          </a:p>
+          <a:p>
+            <a:r>
+              <a:rPr lang="en-US" sz="1600" dirty="0"/>
+              <a:t> - </a:t>
+            </a:r>
+            <a:r>
+              <a:rPr lang="en-US" sz="1600" dirty="0">
+                <a:hlinkClick r:id="rId3"/>
+              </a:rPr>
+              <a:t>https://github.com/ing-bank/sparse_dot_topn</a:t>
             </a:r>
             <a:r>
               <a:rPr lang="en-US" sz="1600" dirty="0"/>
@@ -12275,7 +12312,7 @@
           <p:nvPr/>
         </p:nvPicPr>
         <p:blipFill rotWithShape="1">
-          <a:blip r:embed="rId3" cstate="email">
+          <a:blip r:embed="rId4" cstate="email">
             <a:extLst>
               <a:ext uri="{28A0092B-C50C-407E-A947-70E740481C1C}">
                 <a14:useLocalDpi xmlns:a14="http://schemas.microsoft.com/office/drawing/2010/main"/>
@@ -12319,7 +12356,7 @@
         </p:nvSpPr>
         <p:spPr>
           <a:xfrm>
-            <a:off x="6188928" y="3275111"/>
+            <a:off x="6705600" y="3121223"/>
             <a:ext cx="5486400" cy="307777"/>
           </a:xfrm>
           <a:prstGeom prst="rect">
@@ -12380,7 +12417,7 @@
             </a:r>
             <a:r>
               <a:rPr lang="en-US" sz="1600" dirty="0">
-                <a:hlinkClick r:id="rId4"/>
+                <a:hlinkClick r:id="rId5"/>
               </a:rPr>
               <a:t>https://en.wikipedia.org/wiki/Data_deduplication</a:t>
             </a:r>
@@ -14056,7 +14093,7 @@
         <p:spPr>
           <a:xfrm>
             <a:off x="151213" y="3611067"/>
-            <a:ext cx="7987553" cy="1600438"/>
+            <a:ext cx="7987553" cy="2462213"/>
           </a:xfrm>
           <a:prstGeom prst="rect">
             <a:avLst/>
@@ -14139,6 +14176,63 @@
             <a:r>
               <a:rPr lang="en-US" dirty="0"/>
               <a:t> uses Jaccard similarity, or the number of features that two sets have in common divided by the total features in both sets</a:t>
+            </a:r>
+          </a:p>
+          <a:p>
+            <a:endParaRPr lang="en-US" dirty="0"/>
+          </a:p>
+          <a:p>
+            <a:r>
+              <a:rPr lang="en-US" dirty="0"/>
+              <a:t>LSH and </a:t>
+            </a:r>
+            <a:r>
+              <a:rPr lang="en-US" dirty="0" err="1"/>
+              <a:t>MinHash</a:t>
+            </a:r>
+            <a:r>
+              <a:rPr lang="en-US" dirty="0"/>
+              <a:t> are now available in </a:t>
+            </a:r>
+            <a:r>
+              <a:rPr lang="en-US" dirty="0" err="1"/>
+              <a:t>PySpark</a:t>
+            </a:r>
+            <a:r>
+              <a:rPr lang="en-US" dirty="0"/>
+              <a:t>:</a:t>
+            </a:r>
+          </a:p>
+          <a:p>
+            <a:r>
+              <a:rPr lang="en-US" dirty="0"/>
+              <a:t> - </a:t>
+            </a:r>
+            <a:r>
+              <a:rPr lang="en-US" dirty="0">
+                <a:hlinkClick r:id="rId4"/>
+              </a:rPr>
+              <a:t>https://spark.apache.org/docs/latest/ml-features#locality-sensitive-hashing</a:t>
+            </a:r>
+            <a:r>
+              <a:rPr lang="en-US" dirty="0"/>
+              <a:t> </a:t>
+            </a:r>
+          </a:p>
+          <a:p>
+            <a:r>
+              <a:rPr lang="en-US" dirty="0"/>
+              <a:t> - </a:t>
+            </a:r>
+            <a:r>
+              <a:rPr lang="en-US" dirty="0">
+                <a:hlinkClick r:id="rId5"/>
+              </a:rPr>
+              <a:t>https://spark.apache.org/docs/latest/ml-features#minhash-for-jaccard-distance</a:t>
+            </a:r>
+            <a:r>
+              <a:rPr lang="en-US" dirty="0"/>
+              <a:t> </a:t>
             </a:r>
           </a:p>
         </p:txBody>
@@ -14197,7 +14291,7 @@
           <a:p>
             <a:r>
               <a:rPr lang="en-US" dirty="0"/>
-              <a:t> for each record (make text field)</a:t>
+              <a:t> for each record's name field</a:t>
             </a:r>
           </a:p>
           <a:p>
@@ -14256,6 +14350,123 @@
             <a:r>
               <a:rPr lang="en-US" sz="2800" b="1" dirty="0"/>
               <a:t>Thinking: How to</a:t>
+            </a:r>
+          </a:p>
+        </p:txBody>
+      </p:sp>
+      <p:pic>
+        <p:nvPicPr>
+          <p:cNvPr id="5" name="Picture 4">
+            <a:extLst>
+              <a:ext uri="{FF2B5EF4-FFF2-40B4-BE49-F238E27FC236}">
+                <a16:creationId xmlns:a16="http://schemas.microsoft.com/office/drawing/2014/main" id="{0D8ADB14-6FDC-C145-8AE6-F8B08389B983}"/>
+              </a:ext>
+            </a:extLst>
+          </p:cNvPr>
+          <p:cNvPicPr>
+            <a:picLocks noChangeAspect="1"/>
+          </p:cNvPicPr>
+          <p:nvPr/>
+        </p:nvPicPr>
+        <p:blipFill>
+          <a:blip r:embed="rId6" cstate="email">
+            <a:extLst>
+              <a:ext uri="{28A0092B-C50C-407E-A947-70E740481C1C}">
+                <a14:useLocalDpi xmlns:a14="http://schemas.microsoft.com/office/drawing/2010/main"/>
+              </a:ext>
+            </a:extLst>
+          </a:blip>
+          <a:stretch>
+            <a:fillRect/>
+          </a:stretch>
+        </p:blipFill>
+        <p:spPr>
+          <a:xfrm>
+            <a:off x="8515284" y="298368"/>
+            <a:ext cx="3336077" cy="2693245"/>
+          </a:xfrm>
+          <a:prstGeom prst="rect">
+            <a:avLst/>
+          </a:prstGeom>
+        </p:spPr>
+      </p:pic>
+      <p:sp>
+        <p:nvSpPr>
+          <p:cNvPr id="6" name="TextBox 5">
+            <a:extLst>
+              <a:ext uri="{FF2B5EF4-FFF2-40B4-BE49-F238E27FC236}">
+                <a16:creationId xmlns:a16="http://schemas.microsoft.com/office/drawing/2014/main" id="{156D7063-6A95-174B-8526-E8791152CCBA}"/>
+              </a:ext>
+            </a:extLst>
+          </p:cNvPr>
+          <p:cNvSpPr txBox="1"/>
+          <p:nvPr/>
+        </p:nvSpPr>
+        <p:spPr>
+          <a:xfrm>
+            <a:off x="8326924" y="3101185"/>
+            <a:ext cx="3865076" cy="1815882"/>
+          </a:xfrm>
+          <a:prstGeom prst="rect">
+            <a:avLst/>
+          </a:prstGeom>
+          <a:noFill/>
+        </p:spPr>
+        <p:txBody>
+          <a:bodyPr wrap="square" rtlCol="0">
+            <a:spAutoFit/>
+          </a:bodyPr>
+          <a:lstStyle/>
+          <a:p>
+            <a:r>
+              <a:rPr lang="en-US" dirty="0"/>
+              <a:t>How to avoid </a:t>
+            </a:r>
+            <a:r>
+              <a:rPr lang="en-US" dirty="0" err="1"/>
+              <a:t>NxN</a:t>
+            </a:r>
+            <a:r>
+              <a:rPr lang="en-US" dirty="0"/>
+              <a:t> time complexity.</a:t>
+            </a:r>
+          </a:p>
+          <a:p>
+            <a:r>
+              <a:rPr lang="en-US" dirty="0"/>
+              <a:t>Select relatively big blocks of "close" contacts.</a:t>
+            </a:r>
+          </a:p>
+          <a:p>
+            <a:r>
+              <a:rPr lang="en-US" dirty="0"/>
+              <a:t>They will be close to diagonal.</a:t>
+            </a:r>
+          </a:p>
+          <a:p>
+            <a:r>
+              <a:rPr lang="en-US" dirty="0"/>
+              <a:t>Then in each of these blocks find smaller blocks. </a:t>
+            </a:r>
+          </a:p>
+          <a:p>
+            <a:r>
+              <a:rPr lang="en-US" dirty="0"/>
+              <a:t>Eventually we get to small enough blocks – and assign </a:t>
+            </a:r>
+            <a:r>
+              <a:rPr lang="en-US" dirty="0" err="1"/>
+              <a:t>MasterID</a:t>
+            </a:r>
+            <a:r>
+              <a:rPr lang="en-US" dirty="0"/>
+              <a:t> to them.</a:t>
+            </a:r>
+          </a:p>
+          <a:p>
+            <a:r>
+              <a:rPr lang="en-US" dirty="0"/>
+              <a:t>It is similar to building a decision tree.</a:t>
             </a:r>
           </a:p>
         </p:txBody>
